--- a/AgenticAI/4-Agent-Architecture/ReAct.pptx
+++ b/AgenticAI/4-Agent-Architecture/ReAct.pptx
@@ -5,23 +5,21 @@
     <p:sldMasterId id="2147483648" r:id="rId1"/>
   </p:sldMasterIdLst>
   <p:notesMasterIdLst>
-    <p:notesMasterId r:id="rId13"/>
+    <p:notesMasterId r:id="rId11"/>
   </p:notesMasterIdLst>
   <p:handoutMasterIdLst>
-    <p:handoutMasterId r:id="rId14"/>
+    <p:handoutMasterId r:id="rId12"/>
   </p:handoutMasterIdLst>
   <p:sldIdLst>
     <p:sldId id="257" r:id="rId2"/>
-    <p:sldId id="278" r:id="rId3"/>
-    <p:sldId id="277" r:id="rId4"/>
-    <p:sldId id="280" r:id="rId5"/>
-    <p:sldId id="281" r:id="rId6"/>
-    <p:sldId id="279" r:id="rId7"/>
-    <p:sldId id="284" r:id="rId8"/>
-    <p:sldId id="283" r:id="rId9"/>
-    <p:sldId id="276" r:id="rId10"/>
-    <p:sldId id="282" r:id="rId11"/>
-    <p:sldId id="275" r:id="rId12"/>
+    <p:sldId id="277" r:id="rId3"/>
+    <p:sldId id="281" r:id="rId4"/>
+    <p:sldId id="279" r:id="rId5"/>
+    <p:sldId id="284" r:id="rId6"/>
+    <p:sldId id="283" r:id="rId7"/>
+    <p:sldId id="276" r:id="rId8"/>
+    <p:sldId id="282" r:id="rId9"/>
+    <p:sldId id="275" r:id="rId10"/>
   </p:sldIdLst>
   <p:sldSz cx="12192000" cy="6858000"/>
   <p:notesSz cx="6858000" cy="9144000"/>
@@ -225,7 +223,7 @@
           <a:p>
             <a:fld id="{7BAEECA8-D063-486F-AE31-5020270C1449}" type="datetimeFigureOut">
               <a:rPr lang="en-US" smtClean="0"/>
-              <a:t>4/29/2026</a:t>
+              <a:t>7/9/2026</a:t>
             </a:fld>
             <a:endParaRPr lang="en-US"/>
           </a:p>
@@ -402,7 +400,7 @@
           <a:p>
             <a:fld id="{CB233BD1-3BA8-448D-9D08-7846095EA517}" type="datetimeFigureOut">
               <a:rPr lang="en-US" smtClean="0"/>
-              <a:t>4/29/2026</a:t>
+              <a:t>7/9/2026</a:t>
             </a:fld>
             <a:endParaRPr lang="en-US"/>
           </a:p>
@@ -816,7 +814,7 @@
           <a:p>
             <a:fld id="{6383FAE1-13DE-4511-8C1B-C8AFB720664C}" type="datetimeFigureOut">
               <a:rPr lang="en-US" smtClean="0"/>
-              <a:t>4/29/2026</a:t>
+              <a:t>7/9/2026</a:t>
             </a:fld>
             <a:endParaRPr lang="en-US"/>
           </a:p>
@@ -1014,7 +1012,7 @@
           <a:p>
             <a:fld id="{6383FAE1-13DE-4511-8C1B-C8AFB720664C}" type="datetimeFigureOut">
               <a:rPr lang="en-US" smtClean="0"/>
-              <a:t>4/29/2026</a:t>
+              <a:t>7/9/2026</a:t>
             </a:fld>
             <a:endParaRPr lang="en-US"/>
           </a:p>
@@ -1222,7 +1220,7 @@
           <a:p>
             <a:fld id="{6383FAE1-13DE-4511-8C1B-C8AFB720664C}" type="datetimeFigureOut">
               <a:rPr lang="en-US" smtClean="0"/>
-              <a:t>4/29/2026</a:t>
+              <a:t>7/9/2026</a:t>
             </a:fld>
             <a:endParaRPr lang="en-US"/>
           </a:p>
@@ -1420,7 +1418,7 @@
           <a:p>
             <a:fld id="{6383FAE1-13DE-4511-8C1B-C8AFB720664C}" type="datetimeFigureOut">
               <a:rPr lang="en-US" smtClean="0"/>
-              <a:t>4/29/2026</a:t>
+              <a:t>7/9/2026</a:t>
             </a:fld>
             <a:endParaRPr lang="en-US"/>
           </a:p>
@@ -1695,7 +1693,7 @@
           <a:p>
             <a:fld id="{6383FAE1-13DE-4511-8C1B-C8AFB720664C}" type="datetimeFigureOut">
               <a:rPr lang="en-US" smtClean="0"/>
-              <a:t>4/29/2026</a:t>
+              <a:t>7/9/2026</a:t>
             </a:fld>
             <a:endParaRPr lang="en-US"/>
           </a:p>
@@ -1960,7 +1958,7 @@
           <a:p>
             <a:fld id="{6383FAE1-13DE-4511-8C1B-C8AFB720664C}" type="datetimeFigureOut">
               <a:rPr lang="en-US" smtClean="0"/>
-              <a:t>4/29/2026</a:t>
+              <a:t>7/9/2026</a:t>
             </a:fld>
             <a:endParaRPr lang="en-US"/>
           </a:p>
@@ -2372,7 +2370,7 @@
           <a:p>
             <a:fld id="{6383FAE1-13DE-4511-8C1B-C8AFB720664C}" type="datetimeFigureOut">
               <a:rPr lang="en-US" smtClean="0"/>
-              <a:t>4/29/2026</a:t>
+              <a:t>7/9/2026</a:t>
             </a:fld>
             <a:endParaRPr lang="en-US"/>
           </a:p>
@@ -2513,7 +2511,7 @@
           <a:p>
             <a:fld id="{6383FAE1-13DE-4511-8C1B-C8AFB720664C}" type="datetimeFigureOut">
               <a:rPr lang="en-US" smtClean="0"/>
-              <a:t>4/29/2026</a:t>
+              <a:t>7/9/2026</a:t>
             </a:fld>
             <a:endParaRPr lang="en-US"/>
           </a:p>
@@ -2626,7 +2624,7 @@
           <a:p>
             <a:fld id="{6383FAE1-13DE-4511-8C1B-C8AFB720664C}" type="datetimeFigureOut">
               <a:rPr lang="en-US" smtClean="0"/>
-              <a:t>4/29/2026</a:t>
+              <a:t>7/9/2026</a:t>
             </a:fld>
             <a:endParaRPr lang="en-US"/>
           </a:p>
@@ -2937,7 +2935,7 @@
           <a:p>
             <a:fld id="{6383FAE1-13DE-4511-8C1B-C8AFB720664C}" type="datetimeFigureOut">
               <a:rPr lang="en-US" smtClean="0"/>
-              <a:t>4/29/2026</a:t>
+              <a:t>7/9/2026</a:t>
             </a:fld>
             <a:endParaRPr lang="en-US"/>
           </a:p>
@@ -3228,7 +3226,7 @@
           <a:p>
             <a:fld id="{6383FAE1-13DE-4511-8C1B-C8AFB720664C}" type="datetimeFigureOut">
               <a:rPr lang="en-US" smtClean="0"/>
-              <a:t>4/29/2026</a:t>
+              <a:t>7/9/2026</a:t>
             </a:fld>
             <a:endParaRPr lang="en-US"/>
           </a:p>
@@ -3472,7 +3470,7 @@
           <a:p>
             <a:fld id="{6383FAE1-13DE-4511-8C1B-C8AFB720664C}" type="datetimeFigureOut">
               <a:rPr lang="en-US" smtClean="0"/>
-              <a:t>4/29/2026</a:t>
+              <a:t>7/9/2026</a:t>
             </a:fld>
             <a:endParaRPr lang="en-US"/>
           </a:p>
@@ -4109,643 +4107,7 @@
 </p:sld>
 </file>
 
-<file path=ppt/slides/slide10.xml><?xml version="1.0" encoding="utf-8"?>
-<p:sld xmlns:a="http://schemas.openxmlformats.org/drawingml/2006/main" xmlns:r="http://schemas.openxmlformats.org/officeDocument/2006/relationships" xmlns:p="http://schemas.openxmlformats.org/presentationml/2006/main">
-  <p:cSld>
-    <p:spTree>
-      <p:nvGrpSpPr>
-        <p:cNvPr id="1" name="">
-          <a:extLst>
-            <a:ext uri="{FF2B5EF4-FFF2-40B4-BE49-F238E27FC236}">
-              <a16:creationId xmlns:a16="http://schemas.microsoft.com/office/drawing/2014/main" id="{B207B733-7BFD-B3D4-E800-5FDD552343FD}"/>
-            </a:ext>
-          </a:extLst>
-        </p:cNvPr>
-        <p:cNvGrpSpPr/>
-        <p:nvPr/>
-      </p:nvGrpSpPr>
-      <p:grpSpPr>
-        <a:xfrm>
-          <a:off x="0" y="0"/>
-          <a:ext cx="0" cy="0"/>
-          <a:chOff x="0" y="0"/>
-          <a:chExt cx="0" cy="0"/>
-        </a:xfrm>
-      </p:grpSpPr>
-      <p:sp>
-        <p:nvSpPr>
-          <p:cNvPr id="4" name="TextBox 3">
-            <a:extLst>
-              <a:ext uri="{FF2B5EF4-FFF2-40B4-BE49-F238E27FC236}">
-                <a16:creationId xmlns:a16="http://schemas.microsoft.com/office/drawing/2014/main" id="{5F1E3023-2C55-4A3C-623A-A6E2961E2651}"/>
-              </a:ext>
-            </a:extLst>
-          </p:cNvPr>
-          <p:cNvSpPr txBox="1"/>
-          <p:nvPr/>
-        </p:nvSpPr>
-        <p:spPr>
-          <a:xfrm>
-            <a:off x="630936" y="-99048"/>
-            <a:ext cx="11045952" cy="5262979"/>
-          </a:xfrm>
-          <a:prstGeom prst="rect">
-            <a:avLst/>
-          </a:prstGeom>
-          <a:noFill/>
-        </p:spPr>
-        <p:txBody>
-          <a:bodyPr wrap="square">
-            <a:spAutoFit/>
-          </a:bodyPr>
-          <a:lstStyle/>
-          <a:p>
-            <a:pPr>
-              <a:buNone/>
-            </a:pPr>
-            <a:endParaRPr lang="en-US" sz="2400" dirty="0">
-              <a:solidFill>
-                <a:schemeClr val="accent6">
-                  <a:lumMod val="60000"/>
-                  <a:lumOff val="40000"/>
-                </a:schemeClr>
-              </a:solidFill>
-            </a:endParaRPr>
-          </a:p>
-          <a:p>
-            <a:pPr>
-              <a:buNone/>
-            </a:pPr>
-            <a:r>
-              <a:rPr lang="en-US" sz="2400" dirty="0">
-                <a:solidFill>
-                  <a:schemeClr val="accent6">
-                    <a:lumMod val="60000"/>
-                    <a:lumOff val="40000"/>
-                  </a:schemeClr>
-                </a:solidFill>
-              </a:rPr>
-              <a:t>The agent has no real memory. Each time the LLM is called, the entire conversation history — every Thought, Action, and Observation so far — is concatenated into a single prompt and sent again. </a:t>
-            </a:r>
-          </a:p>
-          <a:p>
-            <a:pPr>
-              <a:buNone/>
-            </a:pPr>
-            <a:endParaRPr lang="en-US" sz="2400" dirty="0">
-              <a:solidFill>
-                <a:schemeClr val="accent6">
-                  <a:lumMod val="60000"/>
-                  <a:lumOff val="40000"/>
-                </a:schemeClr>
-              </a:solidFill>
-            </a:endParaRPr>
-          </a:p>
-          <a:p>
-            <a:pPr>
-              <a:buNone/>
-            </a:pPr>
-            <a:r>
-              <a:rPr lang="en-US" sz="2400" dirty="0">
-                <a:solidFill>
-                  <a:schemeClr val="accent6">
-                    <a:lumMod val="60000"/>
-                    <a:lumOff val="40000"/>
-                  </a:schemeClr>
-                </a:solidFill>
-              </a:rPr>
-              <a:t>The loop is bounded by </a:t>
-            </a:r>
-            <a:r>
-              <a:rPr lang="en-US" sz="2400" dirty="0" err="1">
-                <a:solidFill>
-                  <a:schemeClr val="accent6">
-                    <a:lumMod val="60000"/>
-                    <a:lumOff val="40000"/>
-                  </a:schemeClr>
-                </a:solidFill>
-                <a:latin typeface="Courier New" panose="02070309020205020404" pitchFamily="49" charset="0"/>
-              </a:rPr>
-              <a:t>max_iterations</a:t>
-            </a:r>
-            <a:r>
-              <a:rPr lang="en-US" sz="2400" dirty="0">
-                <a:solidFill>
-                  <a:schemeClr val="accent6">
-                    <a:lumMod val="60000"/>
-                    <a:lumOff val="40000"/>
-                  </a:schemeClr>
-                </a:solidFill>
-              </a:rPr>
-              <a:t> (default 15 in </a:t>
-            </a:r>
-            <a:r>
-              <a:rPr lang="en-US" sz="2400" dirty="0" err="1">
-                <a:solidFill>
-                  <a:schemeClr val="accent6">
-                    <a:lumMod val="60000"/>
-                    <a:lumOff val="40000"/>
-                  </a:schemeClr>
-                </a:solidFill>
-              </a:rPr>
-              <a:t>LangChain</a:t>
-            </a:r>
-            <a:r>
-              <a:rPr lang="en-US" sz="2400" dirty="0">
-                <a:solidFill>
-                  <a:schemeClr val="accent6">
-                    <a:lumMod val="60000"/>
-                    <a:lumOff val="40000"/>
-                  </a:schemeClr>
-                </a:solidFill>
-              </a:rPr>
-              <a:t>). If the agent hasn't reached a Final Answer by then, it stops forcibly. This prevents infinite loops but can also cut off complex tasks.</a:t>
-            </a:r>
-          </a:p>
-          <a:p>
-            <a:pPr>
-              <a:buNone/>
-            </a:pPr>
-            <a:endParaRPr lang="en-US" sz="2400" dirty="0">
-              <a:solidFill>
-                <a:schemeClr val="accent6">
-                  <a:lumMod val="60000"/>
-                  <a:lumOff val="40000"/>
-                </a:schemeClr>
-              </a:solidFill>
-            </a:endParaRPr>
-          </a:p>
-          <a:p>
-            <a:pPr>
-              <a:buNone/>
-            </a:pPr>
-            <a:r>
-              <a:rPr lang="en-US" sz="2400" dirty="0">
-                <a:solidFill>
-                  <a:schemeClr val="accent6">
-                    <a:lumMod val="60000"/>
-                    <a:lumOff val="40000"/>
-                  </a:schemeClr>
-                </a:solidFill>
-              </a:rPr>
-              <a:t>The two tools in our code have a natural chain: </a:t>
-            </a:r>
-          </a:p>
-          <a:p>
-            <a:pPr>
-              <a:buNone/>
-            </a:pPr>
-            <a:r>
-              <a:rPr lang="en-US" sz="2400" dirty="0" err="1">
-                <a:solidFill>
-                  <a:schemeClr val="accent6">
-                    <a:lumMod val="60000"/>
-                    <a:lumOff val="40000"/>
-                  </a:schemeClr>
-                </a:solidFill>
-                <a:latin typeface="Courier New" panose="02070309020205020404" pitchFamily="49" charset="0"/>
-              </a:rPr>
-              <a:t>code_generator</a:t>
-            </a:r>
-            <a:r>
-              <a:rPr lang="en-US" sz="2400" dirty="0">
-                <a:solidFill>
-                  <a:schemeClr val="accent6">
-                    <a:lumMod val="60000"/>
-                    <a:lumOff val="40000"/>
-                  </a:schemeClr>
-                </a:solidFill>
-              </a:rPr>
-              <a:t> → LLM writes code → </a:t>
-            </a:r>
-            <a:r>
-              <a:rPr lang="en-US" sz="2400" dirty="0" err="1">
-                <a:solidFill>
-                  <a:schemeClr val="accent6">
-                    <a:lumMod val="60000"/>
-                    <a:lumOff val="40000"/>
-                  </a:schemeClr>
-                </a:solidFill>
-                <a:latin typeface="Courier New" panose="02070309020205020404" pitchFamily="49" charset="0"/>
-              </a:rPr>
-              <a:t>code_executor</a:t>
-            </a:r>
-            <a:r>
-              <a:rPr lang="en-US" sz="2400" dirty="0">
-                <a:solidFill>
-                  <a:schemeClr val="accent6">
-                    <a:lumMod val="60000"/>
-                    <a:lumOff val="40000"/>
-                  </a:schemeClr>
-                </a:solidFill>
-              </a:rPr>
-              <a:t> → LLM sees output → decides if it's correct.</a:t>
-            </a:r>
-          </a:p>
-          <a:p>
-            <a:pPr>
-              <a:buNone/>
-            </a:pPr>
-            <a:r>
-              <a:rPr lang="en-US" sz="2400" dirty="0">
-                <a:solidFill>
-                  <a:schemeClr val="accent6">
-                    <a:lumMod val="60000"/>
-                    <a:lumOff val="40000"/>
-                  </a:schemeClr>
-                </a:solidFill>
-              </a:rPr>
-              <a:t>This is not reflection (no self-critique prompt), but it is multi-step tool chaining, which is a key </a:t>
-            </a:r>
-            <a:r>
-              <a:rPr lang="en-US" sz="2400" dirty="0" err="1">
-                <a:solidFill>
-                  <a:schemeClr val="accent6">
-                    <a:lumMod val="60000"/>
-                    <a:lumOff val="40000"/>
-                  </a:schemeClr>
-                </a:solidFill>
-              </a:rPr>
-              <a:t>ReAct</a:t>
-            </a:r>
-            <a:r>
-              <a:rPr lang="en-US" sz="2400" dirty="0">
-                <a:solidFill>
-                  <a:schemeClr val="accent6">
-                    <a:lumMod val="60000"/>
-                    <a:lumOff val="40000"/>
-                  </a:schemeClr>
-                </a:solidFill>
-              </a:rPr>
-              <a:t> strength.</a:t>
-            </a:r>
-          </a:p>
-        </p:txBody>
-      </p:sp>
-    </p:spTree>
-    <p:extLst>
-      <p:ext uri="{BB962C8B-B14F-4D97-AF65-F5344CB8AC3E}">
-        <p14:creationId xmlns:p14="http://schemas.microsoft.com/office/powerpoint/2010/main" val="106639741"/>
-      </p:ext>
-    </p:extLst>
-  </p:cSld>
-  <p:clrMapOvr>
-    <a:masterClrMapping/>
-  </p:clrMapOvr>
-</p:sld>
-</file>
-
-<file path=ppt/slides/slide11.xml><?xml version="1.0" encoding="utf-8"?>
-<p:sld xmlns:a="http://schemas.openxmlformats.org/drawingml/2006/main" xmlns:r="http://schemas.openxmlformats.org/officeDocument/2006/relationships" xmlns:p="http://schemas.openxmlformats.org/presentationml/2006/main">
-  <p:cSld>
-    <p:spTree>
-      <p:nvGrpSpPr>
-        <p:cNvPr id="1" name="">
-          <a:extLst>
-            <a:ext uri="{FF2B5EF4-FFF2-40B4-BE49-F238E27FC236}">
-              <a16:creationId xmlns:a16="http://schemas.microsoft.com/office/drawing/2014/main" id="{DD931D7F-4279-DA2E-FA64-6CF3C441D414}"/>
-            </a:ext>
-          </a:extLst>
-        </p:cNvPr>
-        <p:cNvGrpSpPr/>
-        <p:nvPr/>
-      </p:nvGrpSpPr>
-      <p:grpSpPr>
-        <a:xfrm>
-          <a:off x="0" y="0"/>
-          <a:ext cx="0" cy="0"/>
-          <a:chOff x="0" y="0"/>
-          <a:chExt cx="0" cy="0"/>
-        </a:xfrm>
-      </p:grpSpPr>
-      <p:sp>
-        <p:nvSpPr>
-          <p:cNvPr id="2" name="Title 1">
-            <a:extLst>
-              <a:ext uri="{FF2B5EF4-FFF2-40B4-BE49-F238E27FC236}">
-                <a16:creationId xmlns:a16="http://schemas.microsoft.com/office/drawing/2014/main" id="{795E1B75-886E-0812-B2FD-DD250C225521}"/>
-              </a:ext>
-            </a:extLst>
-          </p:cNvPr>
-          <p:cNvSpPr>
-            <a:spLocks noGrp="1"/>
-          </p:cNvSpPr>
-          <p:nvPr>
-            <p:ph type="title"/>
-          </p:nvPr>
-        </p:nvSpPr>
-        <p:spPr>
-          <a:xfrm>
-            <a:off x="274320" y="136525"/>
-            <a:ext cx="11466576" cy="832739"/>
-          </a:xfrm>
-        </p:spPr>
-        <p:txBody>
-          <a:bodyPr>
-            <a:normAutofit/>
-          </a:bodyPr>
-          <a:lstStyle/>
-          <a:p>
-            <a:r>
-              <a:rPr lang="en-US" sz="3600" dirty="0"/>
-              <a:t>EXTRA</a:t>
-            </a:r>
-          </a:p>
-        </p:txBody>
-      </p:sp>
-      <p:sp>
-        <p:nvSpPr>
-          <p:cNvPr id="4" name="TextBox 3">
-            <a:extLst>
-              <a:ext uri="{FF2B5EF4-FFF2-40B4-BE49-F238E27FC236}">
-                <a16:creationId xmlns:a16="http://schemas.microsoft.com/office/drawing/2014/main" id="{902F8BE4-9CEA-0DAD-0357-E0A8215F169D}"/>
-              </a:ext>
-            </a:extLst>
-          </p:cNvPr>
-          <p:cNvSpPr txBox="1"/>
-          <p:nvPr/>
-        </p:nvSpPr>
-        <p:spPr>
-          <a:xfrm>
-            <a:off x="274320" y="933117"/>
-            <a:ext cx="11658600" cy="1477328"/>
-          </a:xfrm>
-          <a:prstGeom prst="rect">
-            <a:avLst/>
-          </a:prstGeom>
-          <a:noFill/>
-        </p:spPr>
-        <p:txBody>
-          <a:bodyPr wrap="square">
-            <a:spAutoFit/>
-          </a:bodyPr>
-          <a:lstStyle/>
-          <a:p>
-            <a:pPr marL="0" indent="0">
-              <a:buNone/>
-            </a:pPr>
-            <a:r>
-              <a:rPr lang="en-US" dirty="0" err="1">
-                <a:solidFill>
-                  <a:schemeClr val="accent6">
-                    <a:lumMod val="60000"/>
-                    <a:lumOff val="40000"/>
-                  </a:schemeClr>
-                </a:solidFill>
-              </a:rPr>
-              <a:t>Ffnbksdfd</a:t>
-            </a:r>
-            <a:endParaRPr lang="en-US" dirty="0">
-              <a:solidFill>
-                <a:schemeClr val="accent6">
-                  <a:lumMod val="60000"/>
-                  <a:lumOff val="40000"/>
-                </a:schemeClr>
-              </a:solidFill>
-            </a:endParaRPr>
-          </a:p>
-          <a:p>
-            <a:pPr marL="0" indent="0">
-              <a:buNone/>
-            </a:pPr>
-            <a:r>
-              <a:rPr lang="en-US" dirty="0" err="1">
-                <a:solidFill>
-                  <a:schemeClr val="accent6">
-                    <a:lumMod val="60000"/>
-                    <a:lumOff val="40000"/>
-                  </a:schemeClr>
-                </a:solidFill>
-              </a:rPr>
-              <a:t>Fdslj;f</a:t>
-            </a:r>
-            <a:endParaRPr lang="en-US" dirty="0">
-              <a:solidFill>
-                <a:schemeClr val="accent6">
-                  <a:lumMod val="60000"/>
-                  <a:lumOff val="40000"/>
-                </a:schemeClr>
-              </a:solidFill>
-            </a:endParaRPr>
-          </a:p>
-          <a:p>
-            <a:pPr marL="0" indent="0">
-              <a:buNone/>
-            </a:pPr>
-            <a:endParaRPr lang="en-US" dirty="0">
-              <a:solidFill>
-                <a:schemeClr val="accent6">
-                  <a:lumMod val="60000"/>
-                  <a:lumOff val="40000"/>
-                </a:schemeClr>
-              </a:solidFill>
-            </a:endParaRPr>
-          </a:p>
-          <a:p>
-            <a:pPr marL="0" indent="0">
-              <a:buNone/>
-            </a:pPr>
-            <a:r>
-              <a:rPr lang="en-US" dirty="0" err="1">
-                <a:solidFill>
-                  <a:schemeClr val="accent6">
-                    <a:lumMod val="60000"/>
-                    <a:lumOff val="40000"/>
-                  </a:schemeClr>
-                </a:solidFill>
-              </a:rPr>
-              <a:t>Fl;ds</a:t>
-            </a:r>
-            <a:endParaRPr lang="en-US" dirty="0">
-              <a:solidFill>
-                <a:schemeClr val="accent6">
-                  <a:lumMod val="60000"/>
-                  <a:lumOff val="40000"/>
-                </a:schemeClr>
-              </a:solidFill>
-            </a:endParaRPr>
-          </a:p>
-          <a:p>
-            <a:pPr marL="0" indent="0">
-              <a:buNone/>
-            </a:pPr>
-            <a:endParaRPr lang="en-US" dirty="0">
-              <a:solidFill>
-                <a:schemeClr val="accent6">
-                  <a:lumMod val="60000"/>
-                  <a:lumOff val="40000"/>
-                </a:schemeClr>
-              </a:solidFill>
-            </a:endParaRPr>
-          </a:p>
-        </p:txBody>
-      </p:sp>
-    </p:spTree>
-    <p:extLst>
-      <p:ext uri="{BB962C8B-B14F-4D97-AF65-F5344CB8AC3E}">
-        <p14:creationId xmlns:p14="http://schemas.microsoft.com/office/powerpoint/2010/main" val="366625378"/>
-      </p:ext>
-    </p:extLst>
-  </p:cSld>
-  <p:clrMapOvr>
-    <a:masterClrMapping/>
-  </p:clrMapOvr>
-</p:sld>
-</file>
-
 <file path=ppt/slides/slide2.xml><?xml version="1.0" encoding="utf-8"?>
-<p:sld xmlns:a="http://schemas.openxmlformats.org/drawingml/2006/main" xmlns:r="http://schemas.openxmlformats.org/officeDocument/2006/relationships" xmlns:p="http://schemas.openxmlformats.org/presentationml/2006/main">
-  <p:cSld>
-    <p:spTree>
-      <p:nvGrpSpPr>
-        <p:cNvPr id="1" name="">
-          <a:extLst>
-            <a:ext uri="{FF2B5EF4-FFF2-40B4-BE49-F238E27FC236}">
-              <a16:creationId xmlns:a16="http://schemas.microsoft.com/office/drawing/2014/main" id="{91850B0F-284A-C863-0DBC-EF882C66981E}"/>
-            </a:ext>
-          </a:extLst>
-        </p:cNvPr>
-        <p:cNvGrpSpPr/>
-        <p:nvPr/>
-      </p:nvGrpSpPr>
-      <p:grpSpPr>
-        <a:xfrm>
-          <a:off x="0" y="0"/>
-          <a:ext cx="0" cy="0"/>
-          <a:chOff x="0" y="0"/>
-          <a:chExt cx="0" cy="0"/>
-        </a:xfrm>
-      </p:grpSpPr>
-      <p:sp>
-        <p:nvSpPr>
-          <p:cNvPr id="2" name="TextBox 1">
-            <a:extLst>
-              <a:ext uri="{FF2B5EF4-FFF2-40B4-BE49-F238E27FC236}">
-                <a16:creationId xmlns:a16="http://schemas.microsoft.com/office/drawing/2014/main" id="{3065E13D-38E6-8AE6-C027-414CCF6E1615}"/>
-              </a:ext>
-            </a:extLst>
-          </p:cNvPr>
-          <p:cNvSpPr txBox="1"/>
-          <p:nvPr/>
-        </p:nvSpPr>
-        <p:spPr>
-          <a:xfrm>
-            <a:off x="3012948" y="181094"/>
-            <a:ext cx="6190488" cy="1569660"/>
-          </a:xfrm>
-          <a:prstGeom prst="rect">
-            <a:avLst/>
-          </a:prstGeom>
-          <a:noFill/>
-        </p:spPr>
-        <p:txBody>
-          <a:bodyPr wrap="square">
-            <a:spAutoFit/>
-          </a:bodyPr>
-          <a:lstStyle/>
-          <a:p>
-            <a:r>
-              <a:rPr lang="en-US" sz="2400" b="0" i="0" dirty="0" err="1">
-                <a:solidFill>
-                  <a:schemeClr val="accent6">
-                    <a:lumMod val="60000"/>
-                    <a:lumOff val="40000"/>
-                  </a:schemeClr>
-                </a:solidFill>
-                <a:effectLst/>
-                <a:latin typeface="Anthropic Sans"/>
-              </a:rPr>
-              <a:t>ReAct</a:t>
-            </a:r>
-            <a:r>
-              <a:rPr lang="en-US" sz="2400" b="0" i="0" dirty="0">
-                <a:solidFill>
-                  <a:schemeClr val="accent6">
-                    <a:lumMod val="60000"/>
-                    <a:lumOff val="40000"/>
-                  </a:schemeClr>
-                </a:solidFill>
-                <a:effectLst/>
-                <a:latin typeface="Anthropic Sans"/>
-              </a:rPr>
-              <a:t> Agent (zero-shot-react-description)</a:t>
-            </a:r>
-          </a:p>
-          <a:p>
-            <a:endParaRPr lang="en-US" sz="2400" dirty="0">
-              <a:solidFill>
-                <a:schemeClr val="accent6">
-                  <a:lumMod val="60000"/>
-                  <a:lumOff val="40000"/>
-                </a:schemeClr>
-              </a:solidFill>
-              <a:latin typeface="Anthropic Sans"/>
-            </a:endParaRPr>
-          </a:p>
-          <a:p>
-            <a:r>
-              <a:rPr lang="en-US" sz="2400" dirty="0">
-                <a:solidFill>
-                  <a:schemeClr val="accent6">
-                    <a:lumMod val="60000"/>
-                    <a:lumOff val="40000"/>
-                  </a:schemeClr>
-                </a:solidFill>
-                <a:latin typeface="Anthropic Sans"/>
-              </a:rPr>
-              <a:t>Test this code</a:t>
-            </a:r>
-          </a:p>
-          <a:p>
-            <a:r>
-              <a:rPr lang="en-US" sz="2400" dirty="0">
-                <a:solidFill>
-                  <a:schemeClr val="accent6">
-                    <a:lumMod val="60000"/>
-                    <a:lumOff val="40000"/>
-                  </a:schemeClr>
-                </a:solidFill>
-                <a:latin typeface="Anthropic Sans"/>
-              </a:rPr>
-              <a:t>Make it run   </a:t>
-            </a:r>
-            <a:r>
-              <a:rPr lang="en-US" sz="2400">
-                <a:solidFill>
-                  <a:schemeClr val="accent6">
-                    <a:lumMod val="60000"/>
-                    <a:lumOff val="40000"/>
-                  </a:schemeClr>
-                </a:solidFill>
-                <a:latin typeface="Anthropic Sans"/>
-              </a:rPr>
-              <a:t>in  stream lit</a:t>
-            </a:r>
-            <a:endParaRPr lang="en-US" sz="2400" dirty="0">
-              <a:solidFill>
-                <a:schemeClr val="accent6">
-                  <a:lumMod val="60000"/>
-                  <a:lumOff val="40000"/>
-                </a:schemeClr>
-              </a:solidFill>
-            </a:endParaRPr>
-          </a:p>
-        </p:txBody>
-      </p:sp>
-    </p:spTree>
-    <p:extLst>
-      <p:ext uri="{BB962C8B-B14F-4D97-AF65-F5344CB8AC3E}">
-        <p14:creationId xmlns:p14="http://schemas.microsoft.com/office/powerpoint/2010/main" val="4282278496"/>
-      </p:ext>
-    </p:extLst>
-  </p:cSld>
-  <p:clrMapOvr>
-    <a:masterClrMapping/>
-  </p:clrMapOvr>
-</p:sld>
-</file>
-
-<file path=ppt/slides/slide3.xml><?xml version="1.0" encoding="utf-8"?>
 <p:sld xmlns:a="http://schemas.openxmlformats.org/drawingml/2006/main" xmlns:r="http://schemas.openxmlformats.org/officeDocument/2006/relationships" xmlns:p="http://schemas.openxmlformats.org/presentationml/2006/main">
   <p:cSld>
     <p:spTree>
@@ -4996,7 +4358,7 @@
                   </a:schemeClr>
                 </a:solidFill>
               </a:rPr>
-              <a:t>Combines: </a:t>
+              <a:t>Combines</a:t>
             </a:r>
           </a:p>
           <a:p>
@@ -5030,7 +4392,7 @@
                   </a:schemeClr>
                 </a:solidFill>
               </a:rPr>
-              <a:t>External tools (search, calculator, DB) </a:t>
+              <a:t>External tools (search, calculator, query DB, etc.) </a:t>
             </a:r>
           </a:p>
           <a:p>
@@ -5043,7 +4405,29 @@
                   </a:schemeClr>
                 </a:solidFill>
               </a:rPr>
-              <a:t>Reduces hallucination</a:t>
+              <a:t>This way </a:t>
+            </a:r>
+            <a:r>
+              <a:rPr lang="en-US" sz="2400" dirty="0" err="1">
+                <a:solidFill>
+                  <a:schemeClr val="accent6">
+                    <a:lumMod val="60000"/>
+                    <a:lumOff val="40000"/>
+                  </a:schemeClr>
+                </a:solidFill>
+              </a:rPr>
+              <a:t>ReAct</a:t>
+            </a:r>
+            <a:r>
+              <a:rPr lang="en-US" sz="2400" dirty="0">
+                <a:solidFill>
+                  <a:schemeClr val="accent6">
+                    <a:lumMod val="60000"/>
+                    <a:lumOff val="40000"/>
+                  </a:schemeClr>
+                </a:solidFill>
+              </a:rPr>
+              <a:t> also reduces hallucination</a:t>
             </a:r>
           </a:p>
         </p:txBody>
@@ -5061,404 +4445,7 @@
 </p:sld>
 </file>
 
-<file path=ppt/slides/slide4.xml><?xml version="1.0" encoding="utf-8"?>
-<p:sld xmlns:a="http://schemas.openxmlformats.org/drawingml/2006/main" xmlns:r="http://schemas.openxmlformats.org/officeDocument/2006/relationships" xmlns:p="http://schemas.openxmlformats.org/presentationml/2006/main">
-  <p:cSld>
-    <p:spTree>
-      <p:nvGrpSpPr>
-        <p:cNvPr id="1" name="">
-          <a:extLst>
-            <a:ext uri="{FF2B5EF4-FFF2-40B4-BE49-F238E27FC236}">
-              <a16:creationId xmlns:a16="http://schemas.microsoft.com/office/drawing/2014/main" id="{F291DD89-49A4-9D86-B4F2-88108A35764A}"/>
-            </a:ext>
-          </a:extLst>
-        </p:cNvPr>
-        <p:cNvGrpSpPr/>
-        <p:nvPr/>
-      </p:nvGrpSpPr>
-      <p:grpSpPr>
-        <a:xfrm>
-          <a:off x="0" y="0"/>
-          <a:ext cx="0" cy="0"/>
-          <a:chOff x="0" y="0"/>
-          <a:chExt cx="0" cy="0"/>
-        </a:xfrm>
-      </p:grpSpPr>
-      <p:sp>
-        <p:nvSpPr>
-          <p:cNvPr id="4" name="TextBox 3">
-            <a:extLst>
-              <a:ext uri="{FF2B5EF4-FFF2-40B4-BE49-F238E27FC236}">
-                <a16:creationId xmlns:a16="http://schemas.microsoft.com/office/drawing/2014/main" id="{2F651A3A-DBCE-D1B5-2D50-9C9AB933F166}"/>
-              </a:ext>
-            </a:extLst>
-          </p:cNvPr>
-          <p:cNvSpPr txBox="1"/>
-          <p:nvPr/>
-        </p:nvSpPr>
-        <p:spPr>
-          <a:xfrm>
-            <a:off x="393192" y="696480"/>
-            <a:ext cx="6190488" cy="6001643"/>
-          </a:xfrm>
-          <a:prstGeom prst="rect">
-            <a:avLst/>
-          </a:prstGeom>
-          <a:noFill/>
-        </p:spPr>
-        <p:txBody>
-          <a:bodyPr wrap="square">
-            <a:spAutoFit/>
-          </a:bodyPr>
-          <a:lstStyle/>
-          <a:p>
-            <a:r>
-              <a:rPr lang="en-US" sz="2400" b="1" dirty="0">
-                <a:solidFill>
-                  <a:schemeClr val="accent6">
-                    <a:lumMod val="60000"/>
-                    <a:lumOff val="40000"/>
-                  </a:schemeClr>
-                </a:solidFill>
-              </a:rPr>
-              <a:t>Example</a:t>
-            </a:r>
-          </a:p>
-          <a:p>
-            <a:r>
-              <a:rPr lang="en-US" sz="2400" dirty="0">
-                <a:solidFill>
-                  <a:schemeClr val="accent6">
-                    <a:lumMod val="60000"/>
-                    <a:lumOff val="40000"/>
-                  </a:schemeClr>
-                </a:solidFill>
-              </a:rPr>
-              <a:t>Question:</a:t>
-            </a:r>
-          </a:p>
-          <a:p>
-            <a:r>
-              <a:rPr lang="en-US" sz="2400" dirty="0">
-                <a:solidFill>
-                  <a:schemeClr val="accent6">
-                    <a:lumMod val="60000"/>
-                    <a:lumOff val="40000"/>
-                  </a:schemeClr>
-                </a:solidFill>
-              </a:rPr>
-              <a:t>What is the population of India divided by 2?</a:t>
-            </a:r>
-          </a:p>
-          <a:p>
-            <a:br>
-              <a:rPr lang="en-US" sz="2400" dirty="0">
-                <a:solidFill>
-                  <a:schemeClr val="accent6">
-                    <a:lumMod val="60000"/>
-                    <a:lumOff val="40000"/>
-                  </a:schemeClr>
-                </a:solidFill>
-              </a:rPr>
-            </a:br>
-            <a:endParaRPr lang="en-US" sz="2400" dirty="0">
-              <a:solidFill>
-                <a:schemeClr val="accent6">
-                  <a:lumMod val="60000"/>
-                  <a:lumOff val="40000"/>
-                </a:schemeClr>
-              </a:solidFill>
-            </a:endParaRPr>
-          </a:p>
-          <a:p>
-            <a:r>
-              <a:rPr lang="en-US" sz="2400" dirty="0">
-                <a:solidFill>
-                  <a:schemeClr val="accent6">
-                    <a:lumMod val="60000"/>
-                    <a:lumOff val="40000"/>
-                  </a:schemeClr>
-                </a:solidFill>
-              </a:rPr>
-              <a:t>Step-by-step:</a:t>
-            </a:r>
-          </a:p>
-          <a:p>
-            <a:endParaRPr lang="en-US" sz="2400" b="1" dirty="0">
-              <a:solidFill>
-                <a:schemeClr val="accent6">
-                  <a:lumMod val="60000"/>
-                  <a:lumOff val="40000"/>
-                </a:schemeClr>
-              </a:solidFill>
-            </a:endParaRPr>
-          </a:p>
-          <a:p>
-            <a:r>
-              <a:rPr lang="en-US" sz="2400" b="1" dirty="0">
-                <a:solidFill>
-                  <a:schemeClr val="accent6">
-                    <a:lumMod val="60000"/>
-                    <a:lumOff val="40000"/>
-                  </a:schemeClr>
-                </a:solidFill>
-              </a:rPr>
-              <a:t>Thought:</a:t>
-            </a:r>
-            <a:r>
-              <a:rPr lang="en-US" sz="2400" dirty="0">
-                <a:solidFill>
-                  <a:schemeClr val="accent6">
-                    <a:lumMod val="60000"/>
-                    <a:lumOff val="40000"/>
-                  </a:schemeClr>
-                </a:solidFill>
-              </a:rPr>
-              <a:t> I need population of India</a:t>
-            </a:r>
-            <a:br>
-              <a:rPr lang="en-US" sz="2400" dirty="0">
-                <a:solidFill>
-                  <a:schemeClr val="accent6">
-                    <a:lumMod val="60000"/>
-                    <a:lumOff val="40000"/>
-                  </a:schemeClr>
-                </a:solidFill>
-              </a:rPr>
-            </a:br>
-            <a:r>
-              <a:rPr lang="en-US" sz="2400" b="1" dirty="0">
-                <a:solidFill>
-                  <a:schemeClr val="accent6">
-                    <a:lumMod val="60000"/>
-                    <a:lumOff val="40000"/>
-                  </a:schemeClr>
-                </a:solidFill>
-              </a:rPr>
-              <a:t>Action:</a:t>
-            </a:r>
-            <a:r>
-              <a:rPr lang="en-US" sz="2400" dirty="0">
-                <a:solidFill>
-                  <a:schemeClr val="accent6">
-                    <a:lumMod val="60000"/>
-                    <a:lumOff val="40000"/>
-                  </a:schemeClr>
-                </a:solidFill>
-              </a:rPr>
-              <a:t> Search("India population")</a:t>
-            </a:r>
-            <a:br>
-              <a:rPr lang="en-US" sz="2400" dirty="0">
-                <a:solidFill>
-                  <a:schemeClr val="accent6">
-                    <a:lumMod val="60000"/>
-                    <a:lumOff val="40000"/>
-                  </a:schemeClr>
-                </a:solidFill>
-              </a:rPr>
-            </a:br>
-            <a:r>
-              <a:rPr lang="en-US" sz="2400" b="1" dirty="0">
-                <a:solidFill>
-                  <a:schemeClr val="accent6">
-                    <a:lumMod val="60000"/>
-                    <a:lumOff val="40000"/>
-                  </a:schemeClr>
-                </a:solidFill>
-              </a:rPr>
-              <a:t>Observation:</a:t>
-            </a:r>
-            <a:r>
-              <a:rPr lang="en-US" sz="2400" dirty="0">
-                <a:solidFill>
-                  <a:schemeClr val="accent6">
-                    <a:lumMod val="60000"/>
-                    <a:lumOff val="40000"/>
-                  </a:schemeClr>
-                </a:solidFill>
-              </a:rPr>
-              <a:t> 1.4 billion</a:t>
-            </a:r>
-          </a:p>
-          <a:p>
-            <a:endParaRPr lang="en-US" sz="2400" dirty="0">
-              <a:solidFill>
-                <a:schemeClr val="accent6">
-                  <a:lumMod val="60000"/>
-                  <a:lumOff val="40000"/>
-                </a:schemeClr>
-              </a:solidFill>
-            </a:endParaRPr>
-          </a:p>
-          <a:p>
-            <a:r>
-              <a:rPr lang="en-US" sz="2400" b="1" dirty="0">
-                <a:solidFill>
-                  <a:schemeClr val="accent6">
-                    <a:lumMod val="60000"/>
-                    <a:lumOff val="40000"/>
-                  </a:schemeClr>
-                </a:solidFill>
-              </a:rPr>
-              <a:t>Thought:</a:t>
-            </a:r>
-            <a:r>
-              <a:rPr lang="en-US" sz="2400" dirty="0">
-                <a:solidFill>
-                  <a:schemeClr val="accent6">
-                    <a:lumMod val="60000"/>
-                    <a:lumOff val="40000"/>
-                  </a:schemeClr>
-                </a:solidFill>
-              </a:rPr>
-              <a:t> Now divide by 2</a:t>
-            </a:r>
-            <a:br>
-              <a:rPr lang="en-US" sz="2400" dirty="0">
-                <a:solidFill>
-                  <a:schemeClr val="accent6">
-                    <a:lumMod val="60000"/>
-                    <a:lumOff val="40000"/>
-                  </a:schemeClr>
-                </a:solidFill>
-              </a:rPr>
-            </a:br>
-            <a:r>
-              <a:rPr lang="en-US" sz="2400" b="1" dirty="0">
-                <a:solidFill>
-                  <a:schemeClr val="accent6">
-                    <a:lumMod val="60000"/>
-                    <a:lumOff val="40000"/>
-                  </a:schemeClr>
-                </a:solidFill>
-              </a:rPr>
-              <a:t>Action:</a:t>
-            </a:r>
-            <a:r>
-              <a:rPr lang="en-US" sz="2400" dirty="0">
-                <a:solidFill>
-                  <a:schemeClr val="accent6">
-                    <a:lumMod val="60000"/>
-                    <a:lumOff val="40000"/>
-                  </a:schemeClr>
-                </a:solidFill>
-              </a:rPr>
-              <a:t> Calculator(1.4B / 2)</a:t>
-            </a:r>
-            <a:br>
-              <a:rPr lang="en-US" sz="2400" dirty="0">
-                <a:solidFill>
-                  <a:schemeClr val="accent6">
-                    <a:lumMod val="60000"/>
-                    <a:lumOff val="40000"/>
-                  </a:schemeClr>
-                </a:solidFill>
-              </a:rPr>
-            </a:br>
-            <a:r>
-              <a:rPr lang="en-US" sz="2400" b="1" dirty="0">
-                <a:solidFill>
-                  <a:schemeClr val="accent6">
-                    <a:lumMod val="60000"/>
-                    <a:lumOff val="40000"/>
-                  </a:schemeClr>
-                </a:solidFill>
-              </a:rPr>
-              <a:t>Observation:</a:t>
-            </a:r>
-            <a:r>
-              <a:rPr lang="en-US" sz="2400" dirty="0">
-                <a:solidFill>
-                  <a:schemeClr val="accent6">
-                    <a:lumMod val="60000"/>
-                    <a:lumOff val="40000"/>
-                  </a:schemeClr>
-                </a:solidFill>
-              </a:rPr>
-              <a:t> 0.7 billion</a:t>
-            </a:r>
-          </a:p>
-          <a:p>
-            <a:endParaRPr lang="en-US" sz="2400" dirty="0">
-              <a:solidFill>
-                <a:schemeClr val="accent6">
-                  <a:lumMod val="60000"/>
-                  <a:lumOff val="40000"/>
-                </a:schemeClr>
-              </a:solidFill>
-            </a:endParaRPr>
-          </a:p>
-          <a:p>
-            <a:r>
-              <a:rPr lang="en-US" sz="2400" b="1" dirty="0">
-                <a:solidFill>
-                  <a:schemeClr val="accent6">
-                    <a:lumMod val="60000"/>
-                    <a:lumOff val="40000"/>
-                  </a:schemeClr>
-                </a:solidFill>
-              </a:rPr>
-              <a:t>Final Answer:</a:t>
-            </a:r>
-            <a:r>
-              <a:rPr lang="en-US" sz="2400" dirty="0">
-                <a:solidFill>
-                  <a:schemeClr val="accent6">
-                    <a:lumMod val="60000"/>
-                    <a:lumOff val="40000"/>
-                  </a:schemeClr>
-                </a:solidFill>
-              </a:rPr>
-              <a:t> 700 million</a:t>
-            </a:r>
-          </a:p>
-        </p:txBody>
-      </p:sp>
-      <p:pic>
-        <p:nvPicPr>
-          <p:cNvPr id="3" name="Picture 2">
-            <a:extLst>
-              <a:ext uri="{FF2B5EF4-FFF2-40B4-BE49-F238E27FC236}">
-                <a16:creationId xmlns:a16="http://schemas.microsoft.com/office/drawing/2014/main" id="{F94A4D2A-2CFC-2A3C-F37F-599C70875FED}"/>
-              </a:ext>
-            </a:extLst>
-          </p:cNvPr>
-          <p:cNvPicPr>
-            <a:picLocks noChangeAspect="1"/>
-          </p:cNvPicPr>
-          <p:nvPr/>
-        </p:nvPicPr>
-        <p:blipFill>
-          <a:blip r:embed="rId2"/>
-          <a:stretch>
-            <a:fillRect/>
-          </a:stretch>
-        </p:blipFill>
-        <p:spPr>
-          <a:xfrm>
-            <a:off x="8001000" y="2421089"/>
-            <a:ext cx="3064557" cy="2795532"/>
-          </a:xfrm>
-          <a:prstGeom prst="rect">
-            <a:avLst/>
-          </a:prstGeom>
-        </p:spPr>
-      </p:pic>
-    </p:spTree>
-    <p:extLst>
-      <p:ext uri="{BB962C8B-B14F-4D97-AF65-F5344CB8AC3E}">
-        <p14:creationId xmlns:p14="http://schemas.microsoft.com/office/powerpoint/2010/main" val="1021669746"/>
-      </p:ext>
-    </p:extLst>
-  </p:cSld>
-  <p:clrMapOvr>
-    <a:masterClrMapping/>
-  </p:clrMapOvr>
-</p:sld>
-</file>
-
-<file path=ppt/slides/slide5.xml><?xml version="1.0" encoding="utf-8"?>
+<file path=ppt/slides/slide3.xml><?xml version="1.0" encoding="utf-8"?>
 <p:sld xmlns:a="http://schemas.openxmlformats.org/drawingml/2006/main" xmlns:r="http://schemas.openxmlformats.org/officeDocument/2006/relationships" xmlns:p="http://schemas.openxmlformats.org/presentationml/2006/main">
   <p:cSld>
     <p:spTree>
@@ -5636,7 +4623,7 @@
 </p:sld>
 </file>
 
-<file path=ppt/slides/slide6.xml><?xml version="1.0" encoding="utf-8"?>
+<file path=ppt/slides/slide4.xml><?xml version="1.0" encoding="utf-8"?>
 <p:sld xmlns:a="http://schemas.openxmlformats.org/drawingml/2006/main" xmlns:r="http://schemas.openxmlformats.org/officeDocument/2006/relationships" xmlns:p="http://schemas.openxmlformats.org/presentationml/2006/main">
   <p:cSld>
     <p:spTree>
@@ -5864,7 +4851,7 @@
 </p:sld>
 </file>
 
-<file path=ppt/slides/slide7.xml><?xml version="1.0" encoding="utf-8"?>
+<file path=ppt/slides/slide5.xml><?xml version="1.0" encoding="utf-8"?>
 <p:sld xmlns:a="http://schemas.openxmlformats.org/drawingml/2006/main" xmlns:r="http://schemas.openxmlformats.org/officeDocument/2006/relationships" xmlns:p="http://schemas.openxmlformats.org/presentationml/2006/main">
   <p:cSld>
     <p:spTree>
@@ -5992,7 +4979,7 @@
               <a:t> means the agent gets no worked examples — it figures out which tool to use purely from the tool's </a:t>
             </a:r>
             <a:r>
-              <a:rPr lang="en-US" sz="2400" dirty="0">
+              <a:rPr lang="en-US" sz="2400" b="1" u="sng" dirty="0">
                 <a:solidFill>
                   <a:schemeClr val="accent6">
                     <a:lumMod val="60000"/>
@@ -6062,7 +5049,7 @@
 </p:sld>
 </file>
 
-<file path=ppt/slides/slide8.xml><?xml version="1.0" encoding="utf-8"?>
+<file path=ppt/slides/slide6.xml><?xml version="1.0" encoding="utf-8"?>
 <p:sld xmlns:a="http://schemas.openxmlformats.org/drawingml/2006/main" xmlns:r="http://schemas.openxmlformats.org/officeDocument/2006/relationships" xmlns:p="http://schemas.openxmlformats.org/presentationml/2006/main">
   <p:cSld>
     <p:spTree>
@@ -6098,7 +5085,7 @@
 </p:sld>
 </file>
 
-<file path=ppt/slides/slide9.xml><?xml version="1.0" encoding="utf-8"?>
+<file path=ppt/slides/slide7.xml><?xml version="1.0" encoding="utf-8"?>
 <p:sld xmlns:a="http://schemas.openxmlformats.org/drawingml/2006/main" xmlns:r="http://schemas.openxmlformats.org/officeDocument/2006/relationships" xmlns:p="http://schemas.openxmlformats.org/presentationml/2006/main">
   <p:cSld>
     <p:spTree>
@@ -6220,6 +5207,490 @@
     <p:extLst>
       <p:ext uri="{BB962C8B-B14F-4D97-AF65-F5344CB8AC3E}">
         <p14:creationId xmlns:p14="http://schemas.microsoft.com/office/powerpoint/2010/main" val="74278320"/>
+      </p:ext>
+    </p:extLst>
+  </p:cSld>
+  <p:clrMapOvr>
+    <a:masterClrMapping/>
+  </p:clrMapOvr>
+</p:sld>
+</file>
+
+<file path=ppt/slides/slide8.xml><?xml version="1.0" encoding="utf-8"?>
+<p:sld xmlns:a="http://schemas.openxmlformats.org/drawingml/2006/main" xmlns:r="http://schemas.openxmlformats.org/officeDocument/2006/relationships" xmlns:p="http://schemas.openxmlformats.org/presentationml/2006/main">
+  <p:cSld>
+    <p:spTree>
+      <p:nvGrpSpPr>
+        <p:cNvPr id="1" name="">
+          <a:extLst>
+            <a:ext uri="{FF2B5EF4-FFF2-40B4-BE49-F238E27FC236}">
+              <a16:creationId xmlns:a16="http://schemas.microsoft.com/office/drawing/2014/main" id="{B207B733-7BFD-B3D4-E800-5FDD552343FD}"/>
+            </a:ext>
+          </a:extLst>
+        </p:cNvPr>
+        <p:cNvGrpSpPr/>
+        <p:nvPr/>
+      </p:nvGrpSpPr>
+      <p:grpSpPr>
+        <a:xfrm>
+          <a:off x="0" y="0"/>
+          <a:ext cx="0" cy="0"/>
+          <a:chOff x="0" y="0"/>
+          <a:chExt cx="0" cy="0"/>
+        </a:xfrm>
+      </p:grpSpPr>
+      <p:sp>
+        <p:nvSpPr>
+          <p:cNvPr id="4" name="TextBox 3">
+            <a:extLst>
+              <a:ext uri="{FF2B5EF4-FFF2-40B4-BE49-F238E27FC236}">
+                <a16:creationId xmlns:a16="http://schemas.microsoft.com/office/drawing/2014/main" id="{5F1E3023-2C55-4A3C-623A-A6E2961E2651}"/>
+              </a:ext>
+            </a:extLst>
+          </p:cNvPr>
+          <p:cNvSpPr txBox="1"/>
+          <p:nvPr/>
+        </p:nvSpPr>
+        <p:spPr>
+          <a:xfrm>
+            <a:off x="630936" y="-99048"/>
+            <a:ext cx="11045952" cy="5262979"/>
+          </a:xfrm>
+          <a:prstGeom prst="rect">
+            <a:avLst/>
+          </a:prstGeom>
+          <a:noFill/>
+        </p:spPr>
+        <p:txBody>
+          <a:bodyPr wrap="square">
+            <a:spAutoFit/>
+          </a:bodyPr>
+          <a:lstStyle/>
+          <a:p>
+            <a:pPr>
+              <a:buNone/>
+            </a:pPr>
+            <a:endParaRPr lang="en-US" sz="2400" dirty="0">
+              <a:solidFill>
+                <a:schemeClr val="accent6">
+                  <a:lumMod val="60000"/>
+                  <a:lumOff val="40000"/>
+                </a:schemeClr>
+              </a:solidFill>
+            </a:endParaRPr>
+          </a:p>
+          <a:p>
+            <a:pPr>
+              <a:buNone/>
+            </a:pPr>
+            <a:r>
+              <a:rPr lang="en-US" sz="2400" dirty="0">
+                <a:solidFill>
+                  <a:schemeClr val="accent6">
+                    <a:lumMod val="60000"/>
+                    <a:lumOff val="40000"/>
+                  </a:schemeClr>
+                </a:solidFill>
+              </a:rPr>
+              <a:t>The agent has no real memory. Each time the LLM is called, the entire conversation history — every Thought, Action, and Observation so far — is concatenated into a single prompt and sent again. </a:t>
+            </a:r>
+          </a:p>
+          <a:p>
+            <a:pPr>
+              <a:buNone/>
+            </a:pPr>
+            <a:endParaRPr lang="en-US" sz="2400" dirty="0">
+              <a:solidFill>
+                <a:schemeClr val="accent6">
+                  <a:lumMod val="60000"/>
+                  <a:lumOff val="40000"/>
+                </a:schemeClr>
+              </a:solidFill>
+            </a:endParaRPr>
+          </a:p>
+          <a:p>
+            <a:pPr>
+              <a:buNone/>
+            </a:pPr>
+            <a:r>
+              <a:rPr lang="en-US" sz="2400" dirty="0">
+                <a:solidFill>
+                  <a:schemeClr val="accent6">
+                    <a:lumMod val="60000"/>
+                    <a:lumOff val="40000"/>
+                  </a:schemeClr>
+                </a:solidFill>
+              </a:rPr>
+              <a:t>The loop is bounded by </a:t>
+            </a:r>
+            <a:r>
+              <a:rPr lang="en-US" sz="2400" dirty="0" err="1">
+                <a:solidFill>
+                  <a:schemeClr val="accent6">
+                    <a:lumMod val="60000"/>
+                    <a:lumOff val="40000"/>
+                  </a:schemeClr>
+                </a:solidFill>
+                <a:latin typeface="Courier New" panose="02070309020205020404" pitchFamily="49" charset="0"/>
+              </a:rPr>
+              <a:t>max_iterations</a:t>
+            </a:r>
+            <a:r>
+              <a:rPr lang="en-US" sz="2400" dirty="0">
+                <a:solidFill>
+                  <a:schemeClr val="accent6">
+                    <a:lumMod val="60000"/>
+                    <a:lumOff val="40000"/>
+                  </a:schemeClr>
+                </a:solidFill>
+              </a:rPr>
+              <a:t> (default 15 in </a:t>
+            </a:r>
+            <a:r>
+              <a:rPr lang="en-US" sz="2400" dirty="0" err="1">
+                <a:solidFill>
+                  <a:schemeClr val="accent6">
+                    <a:lumMod val="60000"/>
+                    <a:lumOff val="40000"/>
+                  </a:schemeClr>
+                </a:solidFill>
+              </a:rPr>
+              <a:t>LangChain</a:t>
+            </a:r>
+            <a:r>
+              <a:rPr lang="en-US" sz="2400" dirty="0">
+                <a:solidFill>
+                  <a:schemeClr val="accent6">
+                    <a:lumMod val="60000"/>
+                    <a:lumOff val="40000"/>
+                  </a:schemeClr>
+                </a:solidFill>
+              </a:rPr>
+              <a:t>). If the agent hasn't reached a Final Answer by then, it stops forcibly. This prevents infinite loops but can also cut off complex tasks.</a:t>
+            </a:r>
+          </a:p>
+          <a:p>
+            <a:pPr>
+              <a:buNone/>
+            </a:pPr>
+            <a:endParaRPr lang="en-US" sz="2400" dirty="0">
+              <a:solidFill>
+                <a:schemeClr val="accent6">
+                  <a:lumMod val="60000"/>
+                  <a:lumOff val="40000"/>
+                </a:schemeClr>
+              </a:solidFill>
+            </a:endParaRPr>
+          </a:p>
+          <a:p>
+            <a:pPr>
+              <a:buNone/>
+            </a:pPr>
+            <a:r>
+              <a:rPr lang="en-US" sz="2400" dirty="0">
+                <a:solidFill>
+                  <a:schemeClr val="accent6">
+                    <a:lumMod val="60000"/>
+                    <a:lumOff val="40000"/>
+                  </a:schemeClr>
+                </a:solidFill>
+              </a:rPr>
+              <a:t>The two tools in our code have a natural chain: </a:t>
+            </a:r>
+          </a:p>
+          <a:p>
+            <a:pPr>
+              <a:buNone/>
+            </a:pPr>
+            <a:r>
+              <a:rPr lang="en-US" sz="2400" dirty="0" err="1">
+                <a:solidFill>
+                  <a:schemeClr val="accent6">
+                    <a:lumMod val="60000"/>
+                    <a:lumOff val="40000"/>
+                  </a:schemeClr>
+                </a:solidFill>
+                <a:latin typeface="Courier New" panose="02070309020205020404" pitchFamily="49" charset="0"/>
+              </a:rPr>
+              <a:t>code_generator</a:t>
+            </a:r>
+            <a:r>
+              <a:rPr lang="en-US" sz="2400" dirty="0">
+                <a:solidFill>
+                  <a:schemeClr val="accent6">
+                    <a:lumMod val="60000"/>
+                    <a:lumOff val="40000"/>
+                  </a:schemeClr>
+                </a:solidFill>
+              </a:rPr>
+              <a:t> → LLM writes code → </a:t>
+            </a:r>
+            <a:r>
+              <a:rPr lang="en-US" sz="2400" dirty="0" err="1">
+                <a:solidFill>
+                  <a:schemeClr val="accent6">
+                    <a:lumMod val="60000"/>
+                    <a:lumOff val="40000"/>
+                  </a:schemeClr>
+                </a:solidFill>
+                <a:latin typeface="Courier New" panose="02070309020205020404" pitchFamily="49" charset="0"/>
+              </a:rPr>
+              <a:t>code_executor</a:t>
+            </a:r>
+            <a:r>
+              <a:rPr lang="en-US" sz="2400" dirty="0">
+                <a:solidFill>
+                  <a:schemeClr val="accent6">
+                    <a:lumMod val="60000"/>
+                    <a:lumOff val="40000"/>
+                  </a:schemeClr>
+                </a:solidFill>
+              </a:rPr>
+              <a:t> → LLM sees output → decides if it's correct.</a:t>
+            </a:r>
+          </a:p>
+          <a:p>
+            <a:pPr>
+              <a:buNone/>
+            </a:pPr>
+            <a:r>
+              <a:rPr lang="en-US" sz="2400" dirty="0">
+                <a:solidFill>
+                  <a:schemeClr val="accent6">
+                    <a:lumMod val="60000"/>
+                    <a:lumOff val="40000"/>
+                  </a:schemeClr>
+                </a:solidFill>
+              </a:rPr>
+              <a:t>This is not reflection (no self-critique prompt), but it is multi-step tool chaining, which is a key </a:t>
+            </a:r>
+            <a:r>
+              <a:rPr lang="en-US" sz="2400" dirty="0" err="1">
+                <a:solidFill>
+                  <a:schemeClr val="accent6">
+                    <a:lumMod val="60000"/>
+                    <a:lumOff val="40000"/>
+                  </a:schemeClr>
+                </a:solidFill>
+              </a:rPr>
+              <a:t>ReAct</a:t>
+            </a:r>
+            <a:r>
+              <a:rPr lang="en-US" sz="2400" dirty="0">
+                <a:solidFill>
+                  <a:schemeClr val="accent6">
+                    <a:lumMod val="60000"/>
+                    <a:lumOff val="40000"/>
+                  </a:schemeClr>
+                </a:solidFill>
+              </a:rPr>
+              <a:t> strength.</a:t>
+            </a:r>
+          </a:p>
+        </p:txBody>
+      </p:sp>
+    </p:spTree>
+    <p:extLst>
+      <p:ext uri="{BB962C8B-B14F-4D97-AF65-F5344CB8AC3E}">
+        <p14:creationId xmlns:p14="http://schemas.microsoft.com/office/powerpoint/2010/main" val="106639741"/>
+      </p:ext>
+    </p:extLst>
+  </p:cSld>
+  <p:clrMapOvr>
+    <a:masterClrMapping/>
+  </p:clrMapOvr>
+</p:sld>
+</file>
+
+<file path=ppt/slides/slide9.xml><?xml version="1.0" encoding="utf-8"?>
+<p:sld xmlns:a="http://schemas.openxmlformats.org/drawingml/2006/main" xmlns:r="http://schemas.openxmlformats.org/officeDocument/2006/relationships" xmlns:p="http://schemas.openxmlformats.org/presentationml/2006/main">
+  <p:cSld>
+    <p:spTree>
+      <p:nvGrpSpPr>
+        <p:cNvPr id="1" name="">
+          <a:extLst>
+            <a:ext uri="{FF2B5EF4-FFF2-40B4-BE49-F238E27FC236}">
+              <a16:creationId xmlns:a16="http://schemas.microsoft.com/office/drawing/2014/main" id="{DD931D7F-4279-DA2E-FA64-6CF3C441D414}"/>
+            </a:ext>
+          </a:extLst>
+        </p:cNvPr>
+        <p:cNvGrpSpPr/>
+        <p:nvPr/>
+      </p:nvGrpSpPr>
+      <p:grpSpPr>
+        <a:xfrm>
+          <a:off x="0" y="0"/>
+          <a:ext cx="0" cy="0"/>
+          <a:chOff x="0" y="0"/>
+          <a:chExt cx="0" cy="0"/>
+        </a:xfrm>
+      </p:grpSpPr>
+      <p:sp>
+        <p:nvSpPr>
+          <p:cNvPr id="2" name="Title 1">
+            <a:extLst>
+              <a:ext uri="{FF2B5EF4-FFF2-40B4-BE49-F238E27FC236}">
+                <a16:creationId xmlns:a16="http://schemas.microsoft.com/office/drawing/2014/main" id="{795E1B75-886E-0812-B2FD-DD250C225521}"/>
+              </a:ext>
+            </a:extLst>
+          </p:cNvPr>
+          <p:cNvSpPr>
+            <a:spLocks noGrp="1"/>
+          </p:cNvSpPr>
+          <p:nvPr>
+            <p:ph type="title"/>
+          </p:nvPr>
+        </p:nvSpPr>
+        <p:spPr>
+          <a:xfrm>
+            <a:off x="274320" y="136525"/>
+            <a:ext cx="11466576" cy="832739"/>
+          </a:xfrm>
+        </p:spPr>
+        <p:txBody>
+          <a:bodyPr>
+            <a:normAutofit/>
+          </a:bodyPr>
+          <a:lstStyle/>
+          <a:p>
+            <a:r>
+              <a:rPr lang="en-US" sz="3600" dirty="0"/>
+              <a:t>EXTRA</a:t>
+            </a:r>
+          </a:p>
+        </p:txBody>
+      </p:sp>
+      <p:sp>
+        <p:nvSpPr>
+          <p:cNvPr id="4" name="TextBox 3">
+            <a:extLst>
+              <a:ext uri="{FF2B5EF4-FFF2-40B4-BE49-F238E27FC236}">
+                <a16:creationId xmlns:a16="http://schemas.microsoft.com/office/drawing/2014/main" id="{902F8BE4-9CEA-0DAD-0357-E0A8215F169D}"/>
+              </a:ext>
+            </a:extLst>
+          </p:cNvPr>
+          <p:cNvSpPr txBox="1"/>
+          <p:nvPr/>
+        </p:nvSpPr>
+        <p:spPr>
+          <a:xfrm>
+            <a:off x="274320" y="933117"/>
+            <a:ext cx="11658600" cy="1477328"/>
+          </a:xfrm>
+          <a:prstGeom prst="rect">
+            <a:avLst/>
+          </a:prstGeom>
+          <a:noFill/>
+        </p:spPr>
+        <p:txBody>
+          <a:bodyPr wrap="square">
+            <a:spAutoFit/>
+          </a:bodyPr>
+          <a:lstStyle/>
+          <a:p>
+            <a:pPr marL="0" indent="0">
+              <a:buNone/>
+            </a:pPr>
+            <a:r>
+              <a:rPr lang="en-US" dirty="0" err="1">
+                <a:solidFill>
+                  <a:schemeClr val="accent6">
+                    <a:lumMod val="60000"/>
+                    <a:lumOff val="40000"/>
+                  </a:schemeClr>
+                </a:solidFill>
+              </a:rPr>
+              <a:t>Ffnbksdfd</a:t>
+            </a:r>
+            <a:endParaRPr lang="en-US" dirty="0">
+              <a:solidFill>
+                <a:schemeClr val="accent6">
+                  <a:lumMod val="60000"/>
+                  <a:lumOff val="40000"/>
+                </a:schemeClr>
+              </a:solidFill>
+            </a:endParaRPr>
+          </a:p>
+          <a:p>
+            <a:pPr marL="0" indent="0">
+              <a:buNone/>
+            </a:pPr>
+            <a:r>
+              <a:rPr lang="en-US" dirty="0" err="1">
+                <a:solidFill>
+                  <a:schemeClr val="accent6">
+                    <a:lumMod val="60000"/>
+                    <a:lumOff val="40000"/>
+                  </a:schemeClr>
+                </a:solidFill>
+              </a:rPr>
+              <a:t>Fdslj;f</a:t>
+            </a:r>
+            <a:endParaRPr lang="en-US" dirty="0">
+              <a:solidFill>
+                <a:schemeClr val="accent6">
+                  <a:lumMod val="60000"/>
+                  <a:lumOff val="40000"/>
+                </a:schemeClr>
+              </a:solidFill>
+            </a:endParaRPr>
+          </a:p>
+          <a:p>
+            <a:pPr marL="0" indent="0">
+              <a:buNone/>
+            </a:pPr>
+            <a:endParaRPr lang="en-US" dirty="0">
+              <a:solidFill>
+                <a:schemeClr val="accent6">
+                  <a:lumMod val="60000"/>
+                  <a:lumOff val="40000"/>
+                </a:schemeClr>
+              </a:solidFill>
+            </a:endParaRPr>
+          </a:p>
+          <a:p>
+            <a:pPr marL="0" indent="0">
+              <a:buNone/>
+            </a:pPr>
+            <a:r>
+              <a:rPr lang="en-US" dirty="0" err="1">
+                <a:solidFill>
+                  <a:schemeClr val="accent6">
+                    <a:lumMod val="60000"/>
+                    <a:lumOff val="40000"/>
+                  </a:schemeClr>
+                </a:solidFill>
+              </a:rPr>
+              <a:t>Fl;ds</a:t>
+            </a:r>
+            <a:endParaRPr lang="en-US" dirty="0">
+              <a:solidFill>
+                <a:schemeClr val="accent6">
+                  <a:lumMod val="60000"/>
+                  <a:lumOff val="40000"/>
+                </a:schemeClr>
+              </a:solidFill>
+            </a:endParaRPr>
+          </a:p>
+          <a:p>
+            <a:pPr marL="0" indent="0">
+              <a:buNone/>
+            </a:pPr>
+            <a:endParaRPr lang="en-US" dirty="0">
+              <a:solidFill>
+                <a:schemeClr val="accent6">
+                  <a:lumMod val="60000"/>
+                  <a:lumOff val="40000"/>
+                </a:schemeClr>
+              </a:solidFill>
+            </a:endParaRPr>
+          </a:p>
+        </p:txBody>
+      </p:sp>
+    </p:spTree>
+    <p:extLst>
+      <p:ext uri="{BB962C8B-B14F-4D97-AF65-F5344CB8AC3E}">
+        <p14:creationId xmlns:p14="http://schemas.microsoft.com/office/powerpoint/2010/main" val="366625378"/>
       </p:ext>
     </p:extLst>
   </p:cSld>
